--- a/out/analysis/dnssec_rfc_adoption.pptx
+++ b/out/analysis/dnssec_rfc_adoption.pptx
@@ -4931,7 +4931,7 @@
                 </a:solidFill>
                 <a:latin typeface="Segoe UI"/>
               </a:rPr>
-              <a:t>A clean, monotonic migration over eight years — the clearest adoption signal in the corpus.</a:t>
+              <a:t>Monotonic over eight years, and real growth rather than composition: 1,035 to 30,284 records per day in .gov, a 29x rise against a 1.8x baseline.</a:t>
             </a:r>
           </a:p>
         </p:txBody>
@@ -6034,7 +6034,7 @@
                 </a:solidFill>
                 <a:latin typeface="Segoe UI"/>
               </a:rPr>
-              <a:t>SECOND-ORDER EFFECT</a:t>
+              <a:t>WHAT SHARES HIDE</a:t>
             </a:r>
           </a:p>
         </p:txBody>
@@ -6073,7 +6073,7 @@
                 </a:solidFill>
                 <a:latin typeface="Segoe UI"/>
               </a:rPr>
-              <a:t>NSEC3 recedes as ECDSA advances</a:t>
+              <a:t>NSEC3 did not decline. It stood still.</a:t>
             </a:r>
           </a:p>
         </p:txBody>
@@ -6112,14 +6112,14 @@
                 </a:solidFill>
                 <a:latin typeface="Segoe UI"/>
               </a:rPr>
-              <a:t>Modern signing shifts the trade-off: NSEC3's zone-walking defence is worth less when the algorithm is cheap.</a:t>
+              <a:t>Its share of .gov records fell 10.9% to 5.8% — but per measurement day it held flat at ~2,900 for eight years. The share moved because the denominator grew 79%.</a:t>
             </a:r>
           </a:p>
         </p:txBody>
       </p:sp>
       <p:pic>
         <p:nvPicPr>
-          <p:cNvPr id="5" name="Picture 4" descr="nsec3_vs_ecdsa.png"/>
+          <p:cNvPr id="5" name="Picture 4" descr="growth_vs_baseline.png"/>
           <p:cNvPicPr>
             <a:picLocks noChangeAspect="1"/>
           </p:cNvPicPr>
@@ -6133,8 +6133,8 @@
         </p:blipFill>
         <p:spPr>
           <a:xfrm>
-            <a:off x="2156751" y="2194560"/>
-            <a:ext cx="7878193" cy="3703320"/>
+            <a:off x="2159283" y="2240280"/>
+            <a:ext cx="7873129" cy="3611880"/>
           </a:xfrm>
           <a:prstGeom prst="rect">
             <a:avLst/>
@@ -6175,7 +6175,7 @@
                 </a:solidFill>
                 <a:latin typeface="Segoe UI"/>
               </a:rPr>
-              <a:t>Both series are shares of the same denominator (.gov DNSSEC records), so they sit on one axis.</a:t>
+              <a:t>Per-day rates remove the shared denominator. Only growth above the zone's own 1.8x baseline is adoption.</a:t>
             </a:r>
           </a:p>
         </p:txBody>
